--- a/docs/INFORM_Tanzania_Subnational_Risk.pptx
+++ b/docs/INFORM_Tanzania_Subnational_Risk.pptx
@@ -3321,7 +3321,7 @@
                 </a:solidFill>
                 <a:latin typeface="Calibri"/>
               </a:rPr>
-              <a:t>Prime Minister's Office – Disaster Management Department (PMO-DMD)</a:t>
+              <a:t>Prime Minister's Office, Disaster Management Department (PMO-DMD)</a:t>
             </a:r>
           </a:p>
           <a:p>
@@ -3333,7 +3333,7 @@
                 </a:solidFill>
                 <a:latin typeface="Calibri"/>
               </a:rPr>
-              <a:t>Reproducing the regional INFORM model exactly — and scaling it to all 195 councils</a:t>
+              <a:t>Reproducing the regional INFORM model exactly, and scaling it to all 195 councils</a:t>
             </a:r>
           </a:p>
           <a:p>
@@ -3345,7 +3345,7 @@
                 </a:solidFill>
                 <a:latin typeface="Calibri"/>
               </a:rPr>
-              <a:t>June 2026</a:t>
+              <a:t>June 2026, corrected October 2026</a:t>
             </a:r>
           </a:p>
         </p:txBody>
@@ -3498,7 +3498,7 @@
                 </a:solidFill>
                 <a:latin typeface="Calibri"/>
               </a:rPr>
-              <a:t>Where this actually stands — no overselling</a:t>
+              <a:t>Where this actually stands: no overselling</a:t>
             </a:r>
           </a:p>
         </p:txBody>
@@ -3678,7 +3678,7 @@
                 </a:solidFill>
                 <a:latin typeface="Calibri"/>
               </a:rPr>
-              <a:t>·  Same engine runs at 195 councils / 31 regions (194/195 = district INFORM)</a:t>
+              <a:t>·  Core = the SADC 2024 workbook values only, rebuilt after the October 2026 integrity audit found 165/170 units altered</a:t>
             </a:r>
           </a:p>
           <a:p>
@@ -3694,7 +3694,7 @@
                 </a:solidFill>
                 <a:latin typeface="Calibri"/>
               </a:rPr>
-              <a:t>·  2022 census population per council (sum = 61,741,120, the exact national total)</a:t>
+              <a:t>·  2022 census population per council (sum = 61,741,120, the exact national total); data portal with institutional review chains</a:t>
             </a:r>
           </a:p>
         </p:txBody>
@@ -3858,7 +3858,7 @@
                 </a:solidFill>
                 <a:latin typeface="Calibri"/>
               </a:rPr>
-              <a:t>·  Advanced "exploded" multi-source indicators + weights = literature-proposed, NOT enforced</a:t>
+              <a:t>·  Advancement layer: 12 of 25 earth-observation sub-indicators filled (aridity, SPEI depth, rainfall CV, NDVI, soil moisture, heavy rain, heat days, wind, landslide, earthquake record), shown beside the Core</a:t>
             </a:r>
           </a:p>
           <a:p>
@@ -3874,7 +3874,7 @@
                 </a:solidFill>
                 <a:latin typeface="Calibri"/>
               </a:rPr>
-              <a:t>·  EO drought layers (aridity P/PET, NDVI, soil moisture) computed &amp; validated — research-grade</a:t>
+              <a:t>·  Basket weights are literature-proposed, not calibrated; indices measure intensity, not exposed population</a:t>
             </a:r>
           </a:p>
           <a:p>
@@ -3890,7 +3890,7 @@
                 </a:solidFill>
                 <a:latin typeface="Calibri"/>
               </a:rPr>
-              <a:t>·  Seasonality from CHIRPS 8-zone analysis — context layer, not yet in the index</a:t>
+              <a:t>·  Seasonality from CHIRPS 8-zone analysis: context layer, not yet in the index</a:t>
             </a:r>
           </a:p>
         </p:txBody>
@@ -3969,7 +3969,7 @@
                 </a:solidFill>
                 <a:latin typeface="Calibri"/>
               </a:rPr>
-              <a:t>TRIED — DID NOT WORK</a:t>
+              <a:t>TRIED, DID NOT WORK</a:t>
             </a:r>
           </a:p>
         </p:txBody>
@@ -4054,7 +4054,7 @@
                 </a:solidFill>
                 <a:latin typeface="Calibri"/>
               </a:rPr>
-              <a:t>·  Sentinel-1 flood (VV&lt;-17dB): FAILED validation — flagged soda-lakes/salt-flats as water → PULLED</a:t>
+              <a:t>·  Composite drought index (4 members blended, raise-only floor): scored wet highland councils 10 → WITHDRAWN; season-failure member withheld</a:t>
             </a:r>
           </a:p>
           <a:p>
@@ -4070,7 +4070,7 @@
                 </a:solidFill>
                 <a:latin typeface="Calibri"/>
               </a:rPr>
-              <a:t>·  Lightning (LIS/OTD): not available on Earth Engine — not done</a:t>
+              <a:t>·  Sentinel-1 flood (VV&lt;-17dB): FAILED validation, flagged soda-lakes/salt-flats as water → PULLED</a:t>
             </a:r>
           </a:p>
           <a:p>
@@ -4086,7 +4086,7 @@
                 </a:solidFill>
                 <a:latin typeface="Calibri"/>
               </a:rPr>
-              <a:t>·  SMAP soil moisture product is deprecated (ends 2022) — not current</a:t>
+              <a:t>·  Lightning (LIS/OTD) not done; SMAP soil moisture product deprecated (ends 2022)</a:t>
             </a:r>
           </a:p>
         </p:txBody>
@@ -4250,7 +4250,7 @@
                 </a:solidFill>
                 <a:latin typeface="Calibri"/>
               </a:rPr>
-              <a:t>·  Many vulnerability indicators exist only at region/national level → council = labelled proxy</a:t>
+              <a:t>·  Six indicator groups empty in the workbook (heatwave, lightning, zoonoses, hazmat, vehicle accidents, vulnerable-groups economic)</a:t>
             </a:r>
           </a:p>
           <a:p>
@@ -4266,7 +4266,7 @@
                 </a:solidFill>
                 <a:latin typeface="Calibri"/>
               </a:rPr>
-              <a:t>·  No sustainable update pipeline; no live link to EOCC / early warning</a:t>
+              <a:t>·  Most vulnerability &amp; coping indicators vary only between regions → councils share values, labelled</a:t>
             </a:r>
           </a:p>
           <a:p>
@@ -4282,7 +4282,7 @@
                 </a:solidFill>
                 <a:latin typeface="Calibri"/>
               </a:rPr>
-              <a:t>·  TASAF council poverty &amp; IPC food: data exists but locked in PDFs/registry</a:t>
+              <a:t>·  No sustainable update pipeline from TMA / basin boards / NEMC; no live link to EOCC / early warning</a:t>
             </a:r>
           </a:p>
         </p:txBody>
@@ -4435,7 +4435,7 @@
                 </a:solidFill>
                 <a:latin typeface="Calibri"/>
               </a:rPr>
-              <a:t>What is still missing — the challenge ahead</a:t>
+              <a:t>What is still missing: the challenge ahead</a:t>
             </a:r>
           </a:p>
         </p:txBody>
@@ -4474,7 +4474,7 @@
                 </a:solidFill>
                 <a:latin typeface="Calibri"/>
               </a:rPr>
-              <a:t>■  Subnational risk is not yet operational — decisions happen at council/ward level, but official INFORM stops at national/regional.</a:t>
+              <a:t>■  Subnational risk is not yet operational: decisions happen at council/ward level, but the regional INFORM model stops at 170 district-level units.</a:t>
             </a:r>
           </a:p>
           <a:p>
@@ -4490,7 +4490,7 @@
                 </a:solidFill>
                 <a:latin typeface="Calibri"/>
               </a:rPr>
-              <a:t>■  Local data is scattered and uneven — many key indicators exist only at region or national level (poverty, health surveys, GDP).</a:t>
+              <a:t>■  Local data is scattered and uneven: many key indicators exist only at region or national level (poverty, health surveys, GDP).</a:t>
             </a:r>
           </a:p>
           <a:p>
@@ -4506,7 +4506,7 @@
                 </a:solidFill>
                 <a:latin typeface="Calibri"/>
               </a:rPr>
-              <a:t>■  No sustainable pipeline — capturing, validating and updating local data is still manual and ad-hoc.</a:t>
+              <a:t>■  No sustainable pipeline: capturing, validating and updating local data is still manual and ad-hoc.</a:t>
             </a:r>
           </a:p>
           <a:p>
@@ -4538,7 +4538,7 @@
                 </a:solidFill>
                 <a:latin typeface="Calibri"/>
               </a:rPr>
-              <a:t>■  No live link to action — risk is not yet wired to the EOCC, early-warning, or LGA planning &amp; budgeting.</a:t>
+              <a:t>■  No live link to action: risk is not yet wired to the EOCC, early-warning, or LGA planning &amp; budgeting.</a:t>
             </a:r>
           </a:p>
           <a:p>
@@ -4554,7 +4554,7 @@
                 </a:solidFill>
                 <a:latin typeface="Calibri"/>
               </a:rPr>
-              <a:t>■  Capacity &amp; financing gaps at the local-government level — tools, training and incentives to keep the data flowing.</a:t>
+              <a:t>■  Capacity &amp; financing gaps at the local-government level: tools, training and incentives to keep the data flowing.</a:t>
             </a:r>
           </a:p>
         </p:txBody>
@@ -4707,7 +4707,7 @@
                 </a:solidFill>
                 <a:latin typeface="Calibri"/>
               </a:rPr>
-              <a:t>Research &amp; financial support — for member-state adoption</a:t>
+              <a:t>Research &amp; financial support: for member-state adoption</a:t>
             </a:r>
           </a:p>
         </p:txBody>
@@ -5115,7 +5115,7 @@
                 </a:solidFill>
                 <a:latin typeface="Calibri"/>
               </a:rPr>
-              <a:t>■  LGA capacity building — train sectors to capture &amp; submit</a:t>
+              <a:t>■  LGA capacity building: train sectors to capture &amp; submit</a:t>
             </a:r>
           </a:p>
           <a:p>
@@ -5375,7 +5375,7 @@
                 </a:solidFill>
                 <a:latin typeface="Calibri"/>
               </a:rPr>
-              <a:t>▸  Local-data capture and EO are working but research-grade — and some attempts failed (stated plainly).</a:t>
+              <a:t>▸  Earth-observation layers are shown apart from the Core as an Advancement layer; they are research-grade, and some attempts failed (stated plainly).</a:t>
             </a:r>
           </a:p>
           <a:p>
@@ -5426,7 +5426,7 @@
                 </a:solidFill>
                 <a:latin typeface="Calibri"/>
               </a:rPr>
-              <a:t>PMO-DMD Tanzania   ·   INFORM Subnational Risk   ·   June 2026</a:t>
+              <a:t>PMO-DMD Tanzania   ·   INFORM Subnational Risk   ·   October 2026</a:t>
             </a:r>
           </a:p>
         </p:txBody>
@@ -5618,7 +5618,7 @@
                 </a:solidFill>
                 <a:latin typeface="Calibri"/>
               </a:rPr>
-              <a:t>■  INFORM is a global, open composite index of disaster risk — a single 0–10 score per area (0 = lowest risk, 10 = highest).</a:t>
+              <a:t>■  INFORM is a global, open composite index of disaster risk: a single 0–10 score per area (0 = lowest risk, 10 = highest).</a:t>
             </a:r>
           </a:p>
           <a:p>
@@ -5634,7 +5634,7 @@
                 </a:solidFill>
                 <a:latin typeface="Calibri"/>
               </a:rPr>
-              <a:t>■  Tanzania runs the regional INFORM Model Template (the SADC / IGAD subnational adaptation). The official national INFORM risk is 4.1.</a:t>
+              <a:t>■  Tanzania runs the regional INFORM Model Template (the SADC / IGAD subnational adaptation, 2024 release) at 170 district-level units. INFORM publishes no national figure for a subnational model; the INFORM aggregate of all 195 councils on the workbook data is 3.8 (Hazard &amp; Exposure 2.4, Vulnerability 3.8, Lack of Coping 6.2).</a:t>
             </a:r>
           </a:p>
           <a:p>
@@ -5650,7 +5650,7 @@
                 </a:solidFill>
                 <a:latin typeface="Calibri"/>
               </a:rPr>
-              <a:t>■  Risk is built from three dimensions — the INFORM logic:</a:t>
+              <a:t>■  Risk is built from three dimensions (the INFORM logic):</a:t>
             </a:r>
           </a:p>
           <a:p>
@@ -5666,7 +5666,7 @@
                 </a:solidFill>
                 <a:latin typeface="Calibri"/>
               </a:rPr>
-              <a:t>      –  Hazard &amp; Exposure — the threats (drought, flood, earthquake, conflict…) and who/what is exposed</a:t>
+              <a:t>      •  Hazard &amp; Exposure: the threats (drought, flood, earthquake, conflict…) and who/what is exposed</a:t>
             </a:r>
           </a:p>
           <a:p>
@@ -5682,7 +5682,7 @@
                 </a:solidFill>
                 <a:latin typeface="Calibri"/>
               </a:rPr>
-              <a:t>      –  Vulnerability — susceptibility of people (poverty, health, food insecurity, displacement)</a:t>
+              <a:t>      •  Vulnerability: susceptibility of people (poverty, health, food insecurity, displacement)</a:t>
             </a:r>
           </a:p>
           <a:p>
@@ -5698,7 +5698,7 @@
                 </a:solidFill>
                 <a:latin typeface="Calibri"/>
               </a:rPr>
-              <a:t>      –  Lack of Coping Capacity — weakness of institutions &amp; infrastructure to respond (WASH, health, DRR, governance)</a:t>
+              <a:t>      •  Lack of Coping Capacity: weakness of institutions &amp; infrastructure to respond (WASH, health, DRR, governance)</a:t>
             </a:r>
           </a:p>
           <a:p>
@@ -6659,7 +6659,7 @@
                 </a:solidFill>
                 <a:latin typeface="Calibri"/>
               </a:rPr>
-              <a:t>From an actual value to a 0–10 score — the standardisation chain</a:t>
+              <a:t>From an actual value to a 0–10 score: the standardisation chain</a:t>
             </a:r>
           </a:p>
         </p:txBody>
@@ -6914,7 +6914,7 @@
                 </a:solidFill>
                 <a:latin typeface="Calibri"/>
               </a:rPr>
-              <a:t>3.  Outlier cap — Tukey IQR fence  MAX(MIN(x, Q3+1.5·IQR), Q1−1.5·IQR)</a:t>
+              <a:t>3.  Outlier cap: Tukey IQR fence  MAX(MIN(x, Q3+1.5·IQR), Q1−1.5·IQR)</a:t>
             </a:r>
           </a:p>
         </p:txBody>
@@ -6999,7 +6999,7 @@
                 </a:solidFill>
                 <a:latin typeface="Calibri"/>
               </a:rPr>
-              <a:t>4.  Transform — None | Logarithm LN(0.001+x) | Exponential</a:t>
+              <a:t>4.  Transform: None | Logarithm LN(0.001+x) | Exponential</a:t>
             </a:r>
           </a:p>
         </p:txBody>
@@ -7084,7 +7084,7 @@
                 </a:solidFill>
                 <a:latin typeface="Calibri"/>
               </a:rPr>
-              <a:t>5.  Min–max scaling — 10 × (x − Min) / (Max − Min)  vs a fixed reference</a:t>
+              <a:t>5.  Min–max scaling: 10 × (x − Min) / (Max − Min)  vs a fixed reference</a:t>
             </a:r>
           </a:p>
         </p:txBody>
@@ -7169,7 +7169,7 @@
                 </a:solidFill>
                 <a:latin typeface="Calibri"/>
               </a:rPr>
-              <a:t>6.  Direction — if protective: 10 − score (higher = better)</a:t>
+              <a:t>6.  Direction: if protective: 10 − score (higher = better)</a:t>
             </a:r>
           </a:p>
         </p:txBody>
@@ -7442,7 +7442,7 @@
                 </a:solidFill>
                 <a:latin typeface="Calibri"/>
               </a:rPr>
-              <a:t>A few indicators — many different units (why standardisation is needed)</a:t>
+              <a:t>A few indicators: many different units (why standardisation is needed)</a:t>
             </a:r>
           </a:p>
         </p:txBody>
@@ -7547,7 +7547,7 @@
                             <a:srgbClr val="102A43"/>
                           </a:solidFill>
                         </a:rPr>
-                        <a:t>Food security – insufficient food</a:t>
+                        <a:t>Food security: insufficient food</a:t>
                       </a:r>
                     </a:p>
                   </a:txBody>
@@ -8154,7 +8154,7 @@
                 </a:solidFill>
                 <a:latin typeface="Calibri"/>
               </a:rPr>
-              <a:t>%, years, counts, US$, per-1,000, per-10,000, ratios, Mg/ha/yr, m/yr — all reconciled onto one 0–10 scale.</a:t>
+              <a:t>%, years, counts, US$, per-1,000, per-10,000, ratios, Mg/ha/yr, m/yr: all reconciled onto one 0–10 scale.</a:t>
             </a:r>
           </a:p>
         </p:txBody>
@@ -8394,7 +8394,7 @@
                 </a:solidFill>
                 <a:latin typeface="Calibri"/>
               </a:rPr>
-              <a:t>      –  ROUND( (10 − GEOMEAN((10−c)/10×9+1)) /9 ×10 , 1 )</a:t>
+              <a:t>      •  ROUND( (10 − GEOMEAN((10−c)/10×9+1)) /9 ×10 , 1 )</a:t>
             </a:r>
           </a:p>
           <a:p>
@@ -8410,7 +8410,7 @@
                 </a:solidFill>
                 <a:latin typeface="Calibri"/>
               </a:rPr>
-              <a:t>■  INFORM Risk  =  ∛ ( H × V × LCC )   — cube-root of the three dimensions</a:t>
+              <a:t>■  INFORM Risk  =  ∛ ( H × V × LCC )  : cube-root of the three dimensions</a:t>
             </a:r>
           </a:p>
           <a:p>
@@ -8426,7 +8426,7 @@
                 </a:solidFill>
                 <a:latin typeface="Calibri"/>
               </a:rPr>
-              <a:t>      –  ROUND( H^(1/3) × V^(1/3) × LCC^(1/3) , 1 )</a:t>
+              <a:t>      •  ROUND( H^(1/3) × V^(1/3) × LCC^(1/3) , 1 )</a:t>
             </a:r>
           </a:p>
           <a:p>
@@ -8442,7 +8442,7 @@
                 </a:solidFill>
                 <a:latin typeface="Calibri"/>
               </a:rPr>
-              <a:t>■  The geometric mean means a country cannot "average away" one very weak dimension — high hazard with low coping still yields high risk.</a:t>
+              <a:t>■  The geometric mean means a country cannot "average away" one very weak dimension: high hazard with low coping still yields high risk.</a:t>
             </a:r>
           </a:p>
         </p:txBody>
@@ -8713,7 +8713,7 @@
                 </a:solidFill>
                 <a:latin typeface="Calibri"/>
               </a:rPr>
-              <a:t>■  Opaque — the math is invisible to the people who use and must trust the numbers.</a:t>
+              <a:t>■  Opaque: the math is invisible to the people who use and must trust the numbers.</a:t>
             </a:r>
           </a:p>
           <a:p>
@@ -8729,7 +8729,7 @@
                 </a:solidFill>
                 <a:latin typeface="Calibri"/>
               </a:rPr>
-              <a:t>■  Fixed unit set — built for ~170 districts; it cannot scale to 195 councils, wards or villages.</a:t>
+              <a:t>■  Fixed unit set: built for ~170 districts; it cannot scale to 195 councils, wards or villages.</a:t>
             </a:r>
           </a:p>
           <a:p>
@@ -8745,7 +8745,7 @@
                 </a:solidFill>
                 <a:latin typeface="Calibri"/>
               </a:rPr>
-              <a:t>■  Manual &amp; single-file — one workbook, no version control, easy to break, hard to audit.</a:t>
+              <a:t>■  Manual &amp; single-file: one workbook, no version control, easy to break, hard to audit.</a:t>
             </a:r>
           </a:p>
           <a:p>
@@ -8761,7 +8761,7 @@
                 </a:solidFill>
                 <a:latin typeface="Calibri"/>
               </a:rPr>
-              <a:t>■  Closed to local data — no clean way to add a local indicator or feed council-level values.</a:t>
+              <a:t>■  Closed to local data: no clean way to add a local indicator or feed council-level values.</a:t>
             </a:r>
           </a:p>
           <a:p>
@@ -8777,7 +8777,7 @@
                 </a:solidFill>
                 <a:latin typeface="Calibri"/>
               </a:rPr>
-              <a:t>■  No automation — no live update, no link to early-warning or anticipatory action.</a:t>
+              <a:t>■  No automation: no live update, no link to early-warning or anticipatory action.</a:t>
             </a:r>
           </a:p>
           <a:p>
@@ -8793,7 +8793,7 @@
                 </a:solidFill>
                 <a:latin typeface="Calibri"/>
               </a:rPr>
-              <a:t>■  Result: the model stops at the national / regional level. Local risk — where decisions are made — is out of reach.</a:t>
+              <a:t>■  Result: the model stops at its 170 district-level units of 2024. Council, ward and village risk, where decisions are made, is out of reach.</a:t>
             </a:r>
           </a:p>
         </p:txBody>
@@ -8946,7 +8946,7 @@
                 </a:solidFill>
                 <a:latin typeface="Calibri"/>
               </a:rPr>
-              <a:t>We rebuilt the hidden sheets as a transparent engine — proven identical</a:t>
+              <a:t>We rebuilt the hidden sheets as a transparent engine: proven identical</a:t>
             </a:r>
           </a:p>
         </p:txBody>
@@ -9017,7 +9017,7 @@
                 </a:solidFill>
                 <a:latin typeface="Calibri"/>
               </a:rPr>
-              <a:t>      –  8,664 / 8,664 standardised indicator cells reproduce the template exactly</a:t>
+              <a:t>      •  8,664 / 8,664 standardised indicator cells reproduce the template exactly</a:t>
             </a:r>
           </a:p>
           <a:p>
@@ -9033,7 +9033,7 @@
                 </a:solidFill>
                 <a:latin typeface="Calibri"/>
               </a:rPr>
-              <a:t>      –  170 / 170 district risk scores reproduce the template exactly</a:t>
+              <a:t>      •  170 / 170 district risk scores reproduce the template exactly</a:t>
             </a:r>
           </a:p>
           <a:p>
@@ -9049,7 +9049,7 @@
                 </a:solidFill>
                 <a:latin typeface="Calibri"/>
               </a:rPr>
-              <a:t>■  Now it scales — the same engine runs unchanged on 195 councils and 31 regions (194/195 match district INFORM; the rest are new post-2024 councils).</a:t>
+              <a:t>■  Now it scales: the same engine runs unchanged on 195 councils and 31 regions. Each council carries the values of its workbook unit (25 units back two councils; 20 councils created after the workbook inherit, flagged) until institutions enter council values.</a:t>
             </a:r>
           </a:p>
           <a:p>
@@ -9065,7 +9065,7 @@
                 </a:solidFill>
                 <a:latin typeface="Calibri"/>
               </a:rPr>
-              <a:t>■  Spec-driven &amp; open — add, delete or amend an indicator without touching the math; fully testable and version-controlled.</a:t>
+              <a:t>■  Spec-driven &amp; open: add, delete or amend an indicator without touching the math; fully testable and version-controlled.</a:t>
             </a:r>
           </a:p>
           <a:p>
@@ -9081,7 +9081,7 @@
                 </a:solidFill>
                 <a:latin typeface="Calibri"/>
               </a:rPr>
-              <a:t>■  The regional INFORM core is never altered — it is reproduced exactly; everything new is additive (v2).</a:t>
+              <a:t>■  The regional INFORM core is never altered: it is reproduced exactly; every Tanzanian addition is a separate, labelled Advancement layer shown beside it.</a:t>
             </a:r>
           </a:p>
         </p:txBody>
@@ -9234,7 +9234,7 @@
                 </a:solidFill>
                 <a:latin typeface="Calibri"/>
               </a:rPr>
-              <a:t>Methods — a federated, bottom-up data system</a:t>
+              <a:t>Methods: a federated, bottom-up data system</a:t>
             </a:r>
           </a:p>
         </p:txBody>
@@ -9273,7 +9273,7 @@
                 </a:solidFill>
                 <a:latin typeface="Calibri"/>
               </a:rPr>
-              <a:t>■  Federated collection tools — one shared Excel sent to every sector; they enter ACTUAL values in natural units and a locked formula shows the 0–10 live.</a:t>
+              <a:t>■  Federated collection tools: one shared Excel sent to every sector; they enter ACTUAL values in natural units and a locked formula shows the 0–10 live.</a:t>
             </a:r>
           </a:p>
           <a:p>
@@ -9305,7 +9305,7 @@
                 </a:solidFill>
                 <a:latin typeface="Calibri"/>
               </a:rPr>
-              <a:t>      –  TMA (climate), GST (geology), NEMC (environment), MoH (health), NBS (statistics), MoA/MUCHALI (food), MoW (water), PMO-DMD (DRR)…</a:t>
+              <a:t>      •  TMA (climate), GST (geology), NEMC (environment), MoH (health), NBS (statistics), MoA/MUCHALI (food), MoW (water), PMO-DMD (DRR)…</a:t>
             </a:r>
           </a:p>
           <a:p>
@@ -9321,7 +9321,7 @@
                 </a:solidFill>
                 <a:latin typeface="Calibri"/>
               </a:rPr>
-              <a:t>■  Bottom-up aggregation — village → district → region → country; finer, well-filled data refines the higher level.</a:t>
+              <a:t>■  Bottom-up aggregation: village → district → region → country; finer, well-filled data refines the higher level.</a:t>
             </a:r>
           </a:p>
           <a:p>
@@ -9353,7 +9353,7 @@
                 </a:solidFill>
                 <a:latin typeface="Calibri"/>
               </a:rPr>
-              <a:t>■  Earth Observation computed live (Earth Engine): MODIS NDVI, SMAP soil moisture, CHIRPS aridity — each validated against known geography before use.</a:t>
+              <a:t>■  Earth Observation computed live (Earth Engine): MODIS NDVI, SMAP soil moisture, CHIRPS aridity, each validated against known geography before use.</a:t>
             </a:r>
           </a:p>
         </p:txBody>
